--- a/Schools_ML_Track/camp_2026/slides/ML/ML05.pptx
+++ b/Schools_ML_Track/camp_2026/slides/ML/ML05.pptx
@@ -128,7 +128,7 @@
   <p:extLst>
     <p:ext uri="{521415D9-36F7-43E2-AB2F-B90AF26B5E84}">
       <p14:sectionLst xmlns:p14="http://schemas.microsoft.com/office/powerpoint/2010/main">
-        <p14:section name="Opening" id="{92c0d3ca-fb7a-e673-33a4-30d3550e9faa}">
+        <p14:section name="Opening" id="{0c7f4fb1-842a-6c94-1b09-5a3f6664efec}">
           <p14:sldIdLst>
             <p14:sldId id="256"/>
             <p14:sldId id="257"/>
@@ -139,7 +139,7 @@
             <p14:sldId id="262"/>
           </p14:sldIdLst>
         </p14:section>
-        <p14:section name="Block A" id="{45e6cefc-0f69-f7ab-6916-e665db1c0604}">
+        <p14:section name="Block A" id="{9dc31b2a-38e0-7593-1330-d6080e714398}">
           <p14:sldIdLst>
             <p14:sldId id="263"/>
             <p14:sldId id="264"/>
@@ -149,15 +149,15 @@
             <p14:sldId id="269"/>
           </p14:sldIdLst>
         </p14:section>
-        <p14:section name="Break" id="{1953cbb7-dafc-0aaa-cee5-ef96883d85e4}">
+        <p14:section name="Break" id="{8f79dab8-925d-cb3e-40d9-d0c0c6276037}">
           <p14:sldIdLst>
             <p14:sldId id="267"/>
           </p14:sldIdLst>
         </p14:section>
-        <p14:section name="Block A" id="{487d3e4c-72ae-1e29-f634-d199c092b572}">
+        <p14:section name="Block A" id="{525ce5d1-1609-20d3-5b79-8be763044839}">
           <p14:sldIdLst/>
         </p14:section>
-        <p14:section name="Block B" id="{f9ef27b9-ca25-3175-1b75-9e41e015235c}">
+        <p14:section name="Block B" id="{6136e77c-de67-b558-b6ed-aef606b66a6c}">
           <p14:sldIdLst>
             <p14:sldId id="270"/>
             <p14:sldId id="271"/>
@@ -166,7 +166,7 @@
             <p14:sldId id="274"/>
           </p14:sldIdLst>
         </p14:section>
-        <p14:section name="Make and close" id="{282049f6-6ce6-0486-4a34-3875e2b0bcfe}">
+        <p14:section name="Make and close" id="{ca774a15-0b0c-db32-f13b-6cc4a4cba9fa}">
           <p14:sldIdLst>
             <p14:sldId id="275"/>
             <p14:sldId id="276"/>

--- a/Schools_ML_Track/camp_2026/slides/ML/ML05.pptx
+++ b/Schools_ML_Track/camp_2026/slides/ML/ML05.pptx
@@ -128,7 +128,7 @@
   <p:extLst>
     <p:ext uri="{521415D9-36F7-43E2-AB2F-B90AF26B5E84}">
       <p14:sectionLst xmlns:p14="http://schemas.microsoft.com/office/powerpoint/2010/main">
-        <p14:section name="Opening" id="{0c7f4fb1-842a-6c94-1b09-5a3f6664efec}">
+        <p14:section name="Opening" id="{60b6a442-d108-0066-624b-16198bfedb2d}">
           <p14:sldIdLst>
             <p14:sldId id="256"/>
             <p14:sldId id="257"/>
@@ -139,7 +139,7 @@
             <p14:sldId id="262"/>
           </p14:sldIdLst>
         </p14:section>
-        <p14:section name="Block A" id="{9dc31b2a-38e0-7593-1330-d6080e714398}">
+        <p14:section name="Block A" id="{cc1323c7-4d98-b2b3-380c-bb6901ff7e01}">
           <p14:sldIdLst>
             <p14:sldId id="263"/>
             <p14:sldId id="264"/>
@@ -149,15 +149,15 @@
             <p14:sldId id="269"/>
           </p14:sldIdLst>
         </p14:section>
-        <p14:section name="Break" id="{8f79dab8-925d-cb3e-40d9-d0c0c6276037}">
+        <p14:section name="Break" id="{5c07acdc-4641-f5a8-fc8e-e8a9156c146c}">
           <p14:sldIdLst>
             <p14:sldId id="267"/>
           </p14:sldIdLst>
         </p14:section>
-        <p14:section name="Block A" id="{525ce5d1-1609-20d3-5b79-8be763044839}">
+        <p14:section name="Block A" id="{7efe7002-dc39-d219-3c07-4711f593f5b0}">
           <p14:sldIdLst/>
         </p14:section>
-        <p14:section name="Block B" id="{6136e77c-de67-b558-b6ed-aef606b66a6c}">
+        <p14:section name="Block B" id="{1497fa2f-84a6-f580-2daf-be3f2691d9af}">
           <p14:sldIdLst>
             <p14:sldId id="270"/>
             <p14:sldId id="271"/>
@@ -166,7 +166,7 @@
             <p14:sldId id="274"/>
           </p14:sldIdLst>
         </p14:section>
-        <p14:section name="Make and close" id="{ca774a15-0b0c-db32-f13b-6cc4a4cba9fa}">
+        <p14:section name="Make and close" id="{9500fee7-dd10-0fbf-5ae4-a08140271067}">
           <p14:sldIdLst>
             <p14:sldId id="275"/>
             <p14:sldId id="276"/>
@@ -3647,366 +3647,30 @@
           </a:p>
         </p:txBody>
       </p:sp>
-      <p:sp>
-        <p:nvSpPr>
-          <p:cNvPr id="4" name="Shape 2"/>
-          <p:cNvSpPr/>
+      <p:pic>
+        <p:nvPicPr>
+          <p:cNvPr id="4" name="Image 0" descr="Change one thing">    </p:cNvPr>
+          <p:cNvPicPr>
+            <a:picLocks noChangeAspect="1"/>
+          </p:cNvPicPr>
           <p:nvPr/>
-        </p:nvSpPr>
-        <p:spPr>
-          <a:xfrm>
-            <a:off x="7223760" y="1737360"/>
-            <a:ext cx="4297680" cy="2519172"/>
-          </a:xfrm>
-          <a:prstGeom prst="roundRect">
-            <a:avLst>
-              <a:gd name="adj" fmla="val 2904"/>
-            </a:avLst>
-          </a:prstGeom>
-          <a:solidFill>
-            <a:srgbClr val="111111"/>
-          </a:solidFill>
-          <a:ln/>
-        </p:spPr>
-      </p:sp>
-      <p:sp>
-        <p:nvSpPr>
-          <p:cNvPr id="5" name="Text 3"/>
-          <p:cNvSpPr txBox="1"/>
-          <p:nvPr/>
-        </p:nvSpPr>
-        <p:spPr>
-          <a:xfrm>
-            <a:off x="7424928" y="1938528"/>
-            <a:ext cx="3895344" cy="2116836"/>
-          </a:xfrm>
-          <a:prstGeom prst="rect">
-            <a:avLst/>
-          </a:prstGeom>
-          <a:noFill/>
-          <a:ln/>
-        </p:spPr>
-        <p:txBody>
-          <a:bodyPr wrap="square" lIns="0" tIns="0" rIns="0" bIns="0" rtlCol="0" anchor="t"/>
-          <a:lstStyle/>
-          <a:p>
-            <a:pPr algn="l" indent="0" marL="0">
-              <a:lnSpc>
-                <a:spcPts val="1820"/>
-              </a:lnSpc>
-              <a:buNone/>
-            </a:pPr>
-            <a:r>
-              <a:rPr lang="en-US" sz="1400" dirty="0">
-                <a:solidFill>
-                  <a:srgbClr val="FFFFFF"/>
-                </a:solidFill>
-                <a:latin typeface="Courier New" pitchFamily="34" charset="0"/>
-                <a:ea typeface="Courier New" pitchFamily="34" charset="-122"/>
-                <a:cs typeface="Courier New" pitchFamily="34" charset="-120"/>
-              </a:rPr>
-              <a:t>prices = [1000, 2000, 3000]</a:t>
-            </a:r>
-            <a:endParaRPr lang="en-US" sz="1400" dirty="0"/>
-          </a:p>
-          <a:p>
-            <a:pPr algn="l" indent="0" marL="0">
-              <a:lnSpc>
-                <a:spcPts val="1820"/>
-              </a:lnSpc>
-              <a:buNone/>
-            </a:pPr>
-            <a:r>
-              <a:rPr lang="en-US" sz="1400" dirty="0">
-                <a:solidFill>
-                  <a:srgbClr val="FFFFFF"/>
-                </a:solidFill>
-                <a:latin typeface="Courier New" pitchFamily="34" charset="0"/>
-                <a:ea typeface="Courier New" pitchFamily="34" charset="-122"/>
-                <a:cs typeface="Courier New" pitchFamily="34" charset="-120"/>
-              </a:rPr>
-              <a:t>product = {</a:t>
-            </a:r>
-            <a:endParaRPr lang="en-US" sz="1400" dirty="0"/>
-          </a:p>
-          <a:p>
-            <a:pPr algn="l" indent="0" marL="0">
-              <a:lnSpc>
-                <a:spcPts val="1820"/>
-              </a:lnSpc>
-              <a:buNone/>
-            </a:pPr>
-            <a:r>
-              <a:rPr lang="en-US" sz="1400" dirty="0">
-                <a:solidFill>
-                  <a:srgbClr val="FFFFFF"/>
-                </a:solidFill>
-                <a:latin typeface="Courier New" pitchFamily="34" charset="0"/>
-                <a:ea typeface="Courier New" pitchFamily="34" charset="-122"/>
-                <a:cs typeface="Courier New" pitchFamily="34" charset="-120"/>
-              </a:rPr>
-              <a:t>    </a:t>
-            </a:r>
-            <a:pPr algn="l" indent="0" marL="0">
-              <a:lnSpc>
-                <a:spcPts val="1820"/>
-              </a:lnSpc>
-              <a:buNone/>
-            </a:pPr>
-            <a:r>
-              <a:rPr lang="en-US" sz="1400" dirty="0">
-                <a:solidFill>
-                  <a:srgbClr val="E0BE36"/>
-                </a:solidFill>
-                <a:latin typeface="Courier New" pitchFamily="34" charset="0"/>
-                <a:ea typeface="Courier New" pitchFamily="34" charset="-122"/>
-                <a:cs typeface="Courier New" pitchFamily="34" charset="-120"/>
-              </a:rPr>
-              <a:t>"name"</a:t>
-            </a:r>
-            <a:pPr algn="l" indent="0" marL="0">
-              <a:lnSpc>
-                <a:spcPts val="1820"/>
-              </a:lnSpc>
-              <a:buNone/>
-            </a:pPr>
-            <a:r>
-              <a:rPr lang="en-US" sz="1400" dirty="0">
-                <a:solidFill>
-                  <a:srgbClr val="FFFFFF"/>
-                </a:solidFill>
-                <a:latin typeface="Courier New" pitchFamily="34" charset="0"/>
-                <a:ea typeface="Courier New" pitchFamily="34" charset="-122"/>
-                <a:cs typeface="Courier New" pitchFamily="34" charset="-120"/>
-              </a:rPr>
-              <a:t>: </a:t>
-            </a:r>
-            <a:pPr algn="l" indent="0" marL="0">
-              <a:lnSpc>
-                <a:spcPts val="1820"/>
-              </a:lnSpc>
-              <a:buNone/>
-            </a:pPr>
-            <a:r>
-              <a:rPr lang="en-US" sz="1400" dirty="0">
-                <a:solidFill>
-                  <a:srgbClr val="E0BE36"/>
-                </a:solidFill>
-                <a:latin typeface="Courier New" pitchFamily="34" charset="0"/>
-                <a:ea typeface="Courier New" pitchFamily="34" charset="-122"/>
-                <a:cs typeface="Courier New" pitchFamily="34" charset="-120"/>
-              </a:rPr>
-              <a:t>"Juice"</a:t>
-            </a:r>
-            <a:pPr algn="l" indent="0" marL="0">
-              <a:lnSpc>
-                <a:spcPts val="1820"/>
-              </a:lnSpc>
-              <a:buNone/>
-            </a:pPr>
-            <a:r>
-              <a:rPr lang="en-US" sz="1400" dirty="0">
-                <a:solidFill>
-                  <a:srgbClr val="FFFFFF"/>
-                </a:solidFill>
-                <a:latin typeface="Courier New" pitchFamily="34" charset="0"/>
-                <a:ea typeface="Courier New" pitchFamily="34" charset="-122"/>
-                <a:cs typeface="Courier New" pitchFamily="34" charset="-120"/>
-              </a:rPr>
-              <a:t>, </a:t>
-            </a:r>
-            <a:pPr algn="l" indent="0" marL="0">
-              <a:lnSpc>
-                <a:spcPts val="1820"/>
-              </a:lnSpc>
-              <a:buNone/>
-            </a:pPr>
-            <a:r>
-              <a:rPr lang="en-US" sz="1400" dirty="0">
-                <a:solidFill>
-                  <a:srgbClr val="E0BE36"/>
-                </a:solidFill>
-                <a:latin typeface="Courier New" pitchFamily="34" charset="0"/>
-                <a:ea typeface="Courier New" pitchFamily="34" charset="-122"/>
-                <a:cs typeface="Courier New" pitchFamily="34" charset="-120"/>
-              </a:rPr>
-              <a:t>"price"</a:t>
-            </a:r>
-            <a:pPr algn="l" indent="0" marL="0">
-              <a:lnSpc>
-                <a:spcPts val="1820"/>
-              </a:lnSpc>
-              <a:buNone/>
-            </a:pPr>
-            <a:r>
-              <a:rPr lang="en-US" sz="1400" dirty="0">
-                <a:solidFill>
-                  <a:srgbClr val="FFFFFF"/>
-                </a:solidFill>
-                <a:latin typeface="Courier New" pitchFamily="34" charset="0"/>
-                <a:ea typeface="Courier New" pitchFamily="34" charset="-122"/>
-                <a:cs typeface="Courier New" pitchFamily="34" charset="-120"/>
-              </a:rPr>
-              <a:t>: 2000</a:t>
-            </a:r>
-            <a:endParaRPr lang="en-US" sz="1400" dirty="0"/>
-          </a:p>
-          <a:p>
-            <a:pPr algn="l" indent="0" marL="0">
-              <a:lnSpc>
-                <a:spcPts val="1820"/>
-              </a:lnSpc>
-              <a:buNone/>
-            </a:pPr>
-            <a:r>
-              <a:rPr lang="en-US" sz="1400" dirty="0">
-                <a:solidFill>
-                  <a:srgbClr val="FFFFFF"/>
-                </a:solidFill>
-                <a:latin typeface="Courier New" pitchFamily="34" charset="0"/>
-                <a:ea typeface="Courier New" pitchFamily="34" charset="-122"/>
-                <a:cs typeface="Courier New" pitchFamily="34" charset="-120"/>
-              </a:rPr>
-              <a:t>}</a:t>
-            </a:r>
-            <a:endParaRPr lang="en-US" sz="1400" dirty="0"/>
-          </a:p>
-          <a:p>
-            <a:pPr algn="l" indent="0" marL="0">
-              <a:lnSpc>
-                <a:spcPts val="1820"/>
-              </a:lnSpc>
-              <a:buNone/>
-            </a:pPr>
-            <a:r>
-              <a:rPr lang="en-US" sz="1400" dirty="0">
-                <a:solidFill>
-                  <a:srgbClr val="FFFFFF"/>
-                </a:solidFill>
-                <a:latin typeface="Courier New" pitchFamily="34" charset="0"/>
-                <a:ea typeface="Courier New" pitchFamily="34" charset="-122"/>
-                <a:cs typeface="Courier New" pitchFamily="34" charset="-120"/>
-              </a:rPr>
-              <a:t>first = prices[0]</a:t>
-            </a:r>
-            <a:endParaRPr lang="en-US" sz="1400" dirty="0"/>
-          </a:p>
-          <a:p>
-            <a:pPr algn="l" indent="0" marL="0">
-              <a:lnSpc>
-                <a:spcPts val="1820"/>
-              </a:lnSpc>
-              <a:buNone/>
-            </a:pPr>
-            <a:r>
-              <a:rPr lang="en-US" sz="1400" dirty="0">
-                <a:solidFill>
-                  <a:srgbClr val="FFFFFF"/>
-                </a:solidFill>
-                <a:latin typeface="Courier New" pitchFamily="34" charset="0"/>
-                <a:ea typeface="Courier New" pitchFamily="34" charset="-122"/>
-                <a:cs typeface="Courier New" pitchFamily="34" charset="-120"/>
-              </a:rPr>
-              <a:t>juice_price = product[</a:t>
-            </a:r>
-            <a:pPr algn="l" indent="0" marL="0">
-              <a:lnSpc>
-                <a:spcPts val="1820"/>
-              </a:lnSpc>
-              <a:buNone/>
-            </a:pPr>
-            <a:r>
-              <a:rPr lang="en-US" sz="1400" dirty="0">
-                <a:solidFill>
-                  <a:srgbClr val="E0BE36"/>
-                </a:solidFill>
-                <a:latin typeface="Courier New" pitchFamily="34" charset="0"/>
-                <a:ea typeface="Courier New" pitchFamily="34" charset="-122"/>
-                <a:cs typeface="Courier New" pitchFamily="34" charset="-120"/>
-              </a:rPr>
-              <a:t>"price"</a:t>
-            </a:r>
-            <a:pPr algn="l" indent="0" marL="0">
-              <a:lnSpc>
-                <a:spcPts val="1820"/>
-              </a:lnSpc>
-              <a:buNone/>
-            </a:pPr>
-            <a:r>
-              <a:rPr lang="en-US" sz="1400" dirty="0">
-                <a:solidFill>
-                  <a:srgbClr val="FFFFFF"/>
-                </a:solidFill>
-                <a:latin typeface="Courier New" pitchFamily="34" charset="0"/>
-                <a:ea typeface="Courier New" pitchFamily="34" charset="-122"/>
-                <a:cs typeface="Courier New" pitchFamily="34" charset="-120"/>
-              </a:rPr>
-              <a:t>]</a:t>
-            </a:r>
-            <a:endParaRPr lang="en-US" sz="1400" dirty="0"/>
-          </a:p>
-          <a:p>
-            <a:pPr algn="l" indent="0" marL="0">
-              <a:lnSpc>
-                <a:spcPts val="1820"/>
-              </a:lnSpc>
-              <a:buNone/>
-            </a:pPr>
-            <a:r>
-              <a:rPr lang="en-US" sz="1400" dirty="0">
-                <a:solidFill>
-                  <a:srgbClr val="FFFFFF"/>
-                </a:solidFill>
-                <a:latin typeface="Courier New" pitchFamily="34" charset="0"/>
-                <a:ea typeface="Courier New" pitchFamily="34" charset="-122"/>
-                <a:cs typeface="Courier New" pitchFamily="34" charset="-120"/>
-              </a:rPr>
-              <a:t>print(first)</a:t>
-            </a:r>
-            <a:endParaRPr lang="en-US" sz="1400" dirty="0"/>
-          </a:p>
-          <a:p>
-            <a:pPr algn="l" indent="0" marL="0">
-              <a:lnSpc>
-                <a:spcPts val="1820"/>
-              </a:lnSpc>
-              <a:buNone/>
-            </a:pPr>
-            <a:r>
-              <a:rPr lang="en-US" sz="1400" dirty="0">
-                <a:solidFill>
-                  <a:srgbClr val="FFFFFF"/>
-                </a:solidFill>
-                <a:latin typeface="Courier New" pitchFamily="34" charset="0"/>
-                <a:ea typeface="Courier New" pitchFamily="34" charset="-122"/>
-                <a:cs typeface="Courier New" pitchFamily="34" charset="-120"/>
-              </a:rPr>
-              <a:t>print(juice_price)</a:t>
-            </a:r>
-            <a:endParaRPr lang="en-US" sz="1400" dirty="0"/>
-          </a:p>
-          <a:p>
-            <a:pPr algn="l" indent="0" marL="0">
-              <a:lnSpc>
-                <a:spcPts val="1820"/>
-              </a:lnSpc>
-              <a:buNone/>
-            </a:pPr>
-            <a:r>
-              <a:rPr lang="en-US" sz="1400" dirty="0">
-                <a:solidFill>
-                  <a:srgbClr val="FFFFFF"/>
-                </a:solidFill>
-                <a:latin typeface="Courier New" pitchFamily="34" charset="0"/>
-                <a:ea typeface="Courier New" pitchFamily="34" charset="-122"/>
-                <a:cs typeface="Courier New" pitchFamily="34" charset="-120"/>
-              </a:rPr>
-              <a:t>print(len(prices))</a:t>
-            </a:r>
-            <a:endParaRPr lang="en-US" sz="1400" dirty="0"/>
-          </a:p>
-        </p:txBody>
-      </p:sp>
+        </p:nvPicPr>
+        <p:blipFill>
+          <a:blip r:embed="rId1"/>
+          <a:stretch>
+            <a:fillRect/>
+          </a:stretch>
+        </p:blipFill>
+        <p:spPr>
+          <a:xfrm>
+            <a:off x="9418320" y="2103120"/>
+            <a:ext cx="1828800" cy="1828800"/>
+          </a:xfrm>
+          <a:prstGeom prst="rect">
+            <a:avLst/>
+          </a:prstGeom>
+        </p:spPr>
+      </p:pic>
       <p:sp>
         <p:nvSpPr>
           <p:cNvPr id="25" name="Slide Number Placeholder 0"/>
@@ -6732,15 +6396,15 @@
           <a:p>
             <a:pPr algn="l" indent="0" marL="0">
               <a:lnSpc>
-                <a:spcPts val="3360"/>
+                <a:spcPts val="3120"/>
               </a:lnSpc>
               <a:spcAft>
-                <a:spcPts val="2520"/>
+                <a:spcPts val="2020"/>
               </a:spcAft>
               <a:buNone/>
             </a:pPr>
             <a:r>
-              <a:rPr lang="en-US" sz="2800" dirty="0">
+              <a:rPr lang="en-US" sz="2600" dirty="0">
                 <a:solidFill>
                   <a:srgbClr val="111111"/>
                 </a:solidFill>
@@ -6748,22 +6412,22 @@
                 <a:ea typeface="Lato" pitchFamily="34" charset="-122"/>
                 <a:cs typeface="Lato" pitchFamily="34" charset="-120"/>
               </a:rPr>
-              <a:t>Make the list [2, 4, 6] and print each value plus 1 with a loop. Make a dictionary with the keys name and stock and print the stock. Then loop over the eight petal lengths 1.4, 1.4, 4.7, 4.5, 4.9, 6.0, 5.1, 5.9 and count how many are below 2.5.</a:t>
-            </a:r>
-            <a:endParaRPr lang="en-US" sz="2800" dirty="0"/>
-          </a:p>
-          <a:p>
-            <a:pPr algn="l" indent="0" marL="0">
-              <a:lnSpc>
-                <a:spcPts val="3360"/>
+              <a:t>Make the list [2, 4, 6] and print each value plus 1 with a loop.</a:t>
+            </a:r>
+            <a:endParaRPr lang="en-US" sz="2600" dirty="0"/>
+          </a:p>
+          <a:p>
+            <a:pPr algn="l" indent="0" marL="0">
+              <a:lnSpc>
+                <a:spcPts val="3120"/>
               </a:lnSpc>
               <a:spcAft>
-                <a:spcPts val="2520"/>
+                <a:spcPts val="2020"/>
               </a:spcAft>
               <a:buNone/>
             </a:pPr>
             <a:r>
-              <a:rPr lang="en-US" sz="2800" dirty="0">
+              <a:rPr lang="en-US" sz="2600" dirty="0">
                 <a:solidFill>
                   <a:srgbClr val="111111"/>
                 </a:solidFill>
@@ -6771,9 +6435,55 @@
                 <a:ea typeface="Lato" pitchFamily="34" charset="-122"/>
                 <a:cs typeface="Lato" pitchFamily="34" charset="-120"/>
               </a:rPr>
+              <a:t>Make a dictionary with the keys name and stock and print the stock.</a:t>
+            </a:r>
+            <a:endParaRPr lang="en-US" sz="2600" dirty="0"/>
+          </a:p>
+          <a:p>
+            <a:pPr algn="l" indent="0" marL="0">
+              <a:lnSpc>
+                <a:spcPts val="3120"/>
+              </a:lnSpc>
+              <a:spcAft>
+                <a:spcPts val="2020"/>
+              </a:spcAft>
+              <a:buNone/>
+            </a:pPr>
+            <a:r>
+              <a:rPr lang="en-US" sz="2600" dirty="0">
+                <a:solidFill>
+                  <a:srgbClr val="111111"/>
+                </a:solidFill>
+                <a:latin typeface="Lato" pitchFamily="34" charset="0"/>
+                <a:ea typeface="Lato" pitchFamily="34" charset="-122"/>
+                <a:cs typeface="Lato" pitchFamily="34" charset="-120"/>
+              </a:rPr>
+              <a:t>Then loop over the eight petal lengths 1.4, 1.4, 4.7, 4.5, 4.9, 6.0, 5.1, 5.9 and count how many are below 2.5.</a:t>
+            </a:r>
+            <a:endParaRPr lang="en-US" sz="2600" dirty="0"/>
+          </a:p>
+          <a:p>
+            <a:pPr algn="l" indent="0" marL="0">
+              <a:lnSpc>
+                <a:spcPts val="3120"/>
+              </a:lnSpc>
+              <a:spcAft>
+                <a:spcPts val="2020"/>
+              </a:spcAft>
+              <a:buNone/>
+            </a:pPr>
+            <a:r>
+              <a:rPr lang="en-US" sz="2600" dirty="0">
+                <a:solidFill>
+                  <a:srgbClr val="111111"/>
+                </a:solidFill>
+                <a:latin typeface="Lato" pitchFamily="34" charset="0"/>
+                <a:ea typeface="Lato" pitchFamily="34" charset="-122"/>
+                <a:cs typeface="Lato" pitchFamily="34" charset="-120"/>
+              </a:rPr>
               <a:t>Save it as ML05. Write two sentences: what you changed and how you checked it.</a:t>
             </a:r>
-            <a:endParaRPr lang="en-US" sz="2800" dirty="0"/>
+            <a:endParaRPr lang="en-US" sz="2600" dirty="0"/>
           </a:p>
         </p:txBody>
       </p:sp>
